--- a/decks/geog-landscapes/geog-landscapes_ch2_coastal-processes.pptx
+++ b/decks/geog-landscapes/geog-landscapes_ch2_coastal-processes.pptx
@@ -126,30 +126,30 @@
   <p:extLst>
     <p:ext uri="{521415D9-36F7-43E2-AB2F-B90AF26B5E84}">
       <p14:sectionLst xmlns:p14="http://schemas.microsoft.com/office/powerpoint/2010/main">
-        <p14:section name="Opening" id="{8e1ec31d-0998-40d5-a23c-95065499d052}">
+        <p14:section name="Opening" id="{c5b65d6a-23f9-6dc0-2e09-efcb28d478a7}">
           <p14:sldIdLst>
             <p14:sldId id="256"/>
           </p14:sldIdLst>
         </p14:section>
-        <p14:section name="Gate" id="{947cb6f5-2980-0668-72eb-ab40533f5f08}">
+        <p14:section name="Gate" id="{d6796a19-58e4-02a8-aa42-6321293ecfd5}">
           <p14:sldIdLst>
             <p14:sldId id="257"/>
             <p14:sldId id="258"/>
           </p14:sldIdLst>
         </p14:section>
-        <p14:section name="Pre-teach" id="{af69744e-8430-8af5-d69e-eec8e3b0adca}">
+        <p14:section name="Pre-teach" id="{08842161-2432-1756-49ea-1779caef3708}">
           <p14:sldIdLst>
             <p14:sldId id="259"/>
             <p14:sldId id="260"/>
           </p14:sldIdLst>
         </p14:section>
-        <p14:section name="Read-along" id="{15b4faff-b916-9e63-beac-3e1606a580fe}">
+        <p14:section name="Read-along" id="{63972af4-dd1f-fe85-f6b9-bb1db41e83ee}">
           <p14:sldIdLst>
             <p14:sldId id="261"/>
             <p14:sldId id="262"/>
           </p14:sldIdLst>
         </p14:section>
-        <p14:section name="Teach" id="{10dc461d-070b-a808-ecd4-1c727790c2d9}">
+        <p14:section name="Teach" id="{9e4750c4-5de7-a80d-e560-6772da8ec409}">
           <p14:sldIdLst>
             <p14:sldId id="263"/>
             <p14:sldId id="264"/>
@@ -158,7 +158,7 @@
             <p14:sldId id="267"/>
           </p14:sldIdLst>
         </p14:section>
-        <p14:section name="Routes" id="{a83b7ad9-c5f7-0e76-3e49-70685022b737}">
+        <p14:section name="Routes" id="{fb4168b8-7799-7e7e-0bfa-2abf2dafb403}">
           <p14:sldIdLst>
             <p14:sldId id="268"/>
             <p14:sldId id="269"/>
@@ -166,12 +166,12 @@
             <p14:sldId id="271"/>
           </p14:sldIdLst>
         </p14:section>
-        <p14:section name="Close" id="{7f4b3d0a-f770-7e81-7f50-a2819f3529a6}">
+        <p14:section name="Close" id="{392ac2da-ab6a-c8d5-5b9e-65e065c9679e}">
           <p14:sldIdLst>
             <p14:sldId id="272"/>
           </p14:sldIdLst>
         </p14:section>
-        <p14:section name="Answers" id="{e305e679-d86c-373c-e51f-b2d46cd5553b}">
+        <p14:section name="Answers" id="{587d238d-7eb2-0006-b804-faea18554a72}">
           <p14:sldIdLst>
             <p14:sldId id="273"/>
             <p14:sldId id="274"/>
@@ -1600,7 +1600,7 @@
               <a:t>Do now — retrieval. Silent, no notes, no help: recall comes before any support. Give about four minutes.
 1. Pebbles carried by the waves knock against each other and become smaller and rounder. Which process is this?  →  A   Attrition
 2. Longshore drift moves sediment along the beach in a ___ pattern.  →  zig-zag
-3. Where is deposition most likely to happen?  →  A   Where waves enter a sheltered bay and lose energy
+3. Where is deposition most likely to happen?  →  D   Where waves enter a sheltered bay and lose energy
 Circulate: who gets 3/3 (Stretch route), 2/3 (Core), 0–1 (Support)? Use this to route pupils later in the lesson.</a:t>
             </a:r>
             <a:endParaRPr lang="en-US" dirty="0"/>
@@ -1783,7 +1783,7 @@
               <a:t>Answers — pupils mark their own in a different colour, then hands up for 3/3, 2/3, 1/3.
 1. A   Attrition. Attrition is the load wearing itself down: pebbles knocking into each other and becoming smaller, smoother and rounder.
 2. zig-zag. Swash at an angle, backwash straight back: repeated, this makes a zig-zag along the beach.
-3. A   Where waves enter a sheltered bay and lose energy. Waves deposit when they lose energy: in sheltered bays, with a small fetch, in shallow water and where there is plenty of material.
+3. D   Where waves enter a sheltered bay and lose energy. Waves deposit when they lose energy: in sheltered bays, with a small fetch, in shallow water and where there is plenty of material.
 Say the route each score points to: 3/3 Stretch, 2/3 Core, 0–1 Support. Pupils may choose to move up.</a:t>
             </a:r>
             <a:endParaRPr lang="en-US" dirty="0"/>
@@ -10151,7 +10151,7 @@
                 <a:ea typeface="Calibri" pitchFamily="34" charset="-122"/>
                 <a:cs typeface="Calibri" pitchFamily="34" charset="-120"/>
               </a:rPr>
-              <a:t>Traction</a:t>
+              <a:t>Solution</a:t>
             </a:r>
             <a:endParaRPr lang="en-US" sz="2400" dirty="0"/>
           </a:p>
@@ -10225,7 +10225,7 @@
                 <a:ea typeface="Calibri" pitchFamily="34" charset="-122"/>
                 <a:cs typeface="Calibri" pitchFamily="34" charset="-120"/>
               </a:rPr>
-              <a:t>Solution</a:t>
+              <a:t>Traction</a:t>
             </a:r>
             <a:endParaRPr lang="en-US" sz="2400" dirty="0"/>
           </a:p>
@@ -11919,7 +11919,7 @@
                 <a:ea typeface="Calibri" pitchFamily="34" charset="-122"/>
                 <a:cs typeface="Calibri" pitchFamily="34" charset="-120"/>
               </a:rPr>
-              <a:t>Abrasion</a:t>
+              <a:t>Solution</a:t>
             </a:r>
             <a:endParaRPr lang="en-US" sz="2200" dirty="0"/>
           </a:p>
@@ -11956,7 +11956,7 @@
                 <a:ea typeface="Calibri" pitchFamily="34" charset="-122"/>
                 <a:cs typeface="Calibri" pitchFamily="34" charset="-120"/>
               </a:rPr>
-              <a:t>Hydraulic action</a:t>
+              <a:t>Abrasion</a:t>
             </a:r>
             <a:endParaRPr lang="en-US" sz="2200" dirty="0"/>
           </a:p>
@@ -11993,7 +11993,7 @@
                 <a:ea typeface="Calibri" pitchFamily="34" charset="-122"/>
                 <a:cs typeface="Calibri" pitchFamily="34" charset="-120"/>
               </a:rPr>
-              <a:t>Solution</a:t>
+              <a:t>Hydraulic action</a:t>
             </a:r>
             <a:endParaRPr lang="en-US" sz="2200" dirty="0"/>
           </a:p>
@@ -12395,7 +12395,7 @@
                 <a:ea typeface="Calibri" pitchFamily="34" charset="-122"/>
                 <a:cs typeface="Calibri" pitchFamily="34" charset="-120"/>
               </a:rPr>
-              <a:t>Where waves enter a sheltered bay and lose energy</a:t>
+              <a:t>Where the backwash is stronger than the swash</a:t>
             </a:r>
             <a:endParaRPr lang="en-US" sz="1800" dirty="0"/>
           </a:p>
@@ -12506,7 +12506,7 @@
                 <a:ea typeface="Calibri" pitchFamily="34" charset="-122"/>
                 <a:cs typeface="Calibri" pitchFamily="34" charset="-120"/>
               </a:rPr>
-              <a:t>Where the backwash is stronger than the swash</a:t>
+              <a:t>Where waves enter a sheltered bay and lose energy</a:t>
             </a:r>
             <a:endParaRPr lang="en-US" sz="1800" dirty="0"/>
           </a:p>
@@ -13866,7 +13866,7 @@
                 <a:ea typeface="Calibri" pitchFamily="34" charset="-122"/>
                 <a:cs typeface="Calibri" pitchFamily="34" charset="-120"/>
               </a:rPr>
-              <a:t>A   Where waves enter a sheltered bay and lose energy</a:t>
+              <a:t>D   Where waves enter a sheltered bay and lose energy</a:t>
             </a:r>
             <a:endParaRPr lang="en-US" sz="2200" dirty="0"/>
           </a:p>

--- a/decks/geog-landscapes/geog-landscapes_ch2_coastal-processes.pptx
+++ b/decks/geog-landscapes/geog-landscapes_ch2_coastal-processes.pptx
@@ -126,30 +126,30 @@
   <p:extLst>
     <p:ext uri="{521415D9-36F7-43E2-AB2F-B90AF26B5E84}">
       <p14:sectionLst xmlns:p14="http://schemas.microsoft.com/office/powerpoint/2010/main">
-        <p14:section name="Opening" id="{c5b65d6a-23f9-6dc0-2e09-efcb28d478a7}">
+        <p14:section name="Opening" id="{f8ee1d07-3791-c543-5908-da7163578262}">
           <p14:sldIdLst>
             <p14:sldId id="256"/>
           </p14:sldIdLst>
         </p14:section>
-        <p14:section name="Gate" id="{d6796a19-58e4-02a8-aa42-6321293ecfd5}">
+        <p14:section name="Gate" id="{f650bd81-8105-7827-3176-7f91a23e2bf7}">
           <p14:sldIdLst>
             <p14:sldId id="257"/>
             <p14:sldId id="258"/>
           </p14:sldIdLst>
         </p14:section>
-        <p14:section name="Pre-teach" id="{08842161-2432-1756-49ea-1779caef3708}">
+        <p14:section name="Pre-teach" id="{52aeb399-701e-9318-1d33-9e3dcd722c87}">
           <p14:sldIdLst>
             <p14:sldId id="259"/>
             <p14:sldId id="260"/>
           </p14:sldIdLst>
         </p14:section>
-        <p14:section name="Read-along" id="{63972af4-dd1f-fe85-f6b9-bb1db41e83ee}">
+        <p14:section name="Read-along" id="{2541924b-9710-d242-5d1c-429ff1009789}">
           <p14:sldIdLst>
             <p14:sldId id="261"/>
             <p14:sldId id="262"/>
           </p14:sldIdLst>
         </p14:section>
-        <p14:section name="Teach" id="{9e4750c4-5de7-a80d-e560-6772da8ec409}">
+        <p14:section name="Teach" id="{951b778b-45aa-e0a4-bf5d-f7e9c72bc67c}">
           <p14:sldIdLst>
             <p14:sldId id="263"/>
             <p14:sldId id="264"/>
@@ -158,7 +158,7 @@
             <p14:sldId id="267"/>
           </p14:sldIdLst>
         </p14:section>
-        <p14:section name="Routes" id="{fb4168b8-7799-7e7e-0bfa-2abf2dafb403}">
+        <p14:section name="Routes" id="{1d7483c2-323d-279d-afc5-09bb6390eaa5}">
           <p14:sldIdLst>
             <p14:sldId id="268"/>
             <p14:sldId id="269"/>
@@ -166,12 +166,12 @@
             <p14:sldId id="271"/>
           </p14:sldIdLst>
         </p14:section>
-        <p14:section name="Close" id="{392ac2da-ab6a-c8d5-5b9e-65e065c9679e}">
+        <p14:section name="Close" id="{360daed1-6a78-94c6-d64c-5e6d14ffab2a}">
           <p14:sldIdLst>
             <p14:sldId id="272"/>
           </p14:sldIdLst>
         </p14:section>
-        <p14:section name="Answers" id="{587d238d-7eb2-0006-b804-faea18554a72}">
+        <p14:section name="Answers" id="{960fc50a-0078-9826-0383-c67f66abd499}">
           <p14:sldIdLst>
             <p14:sldId id="273"/>
             <p14:sldId id="274"/>
